--- a/Presentations/AVR Live Class 2.pptx
+++ b/Presentations/AVR Live Class 2.pptx
@@ -287,414 +287,29 @@
 </p:presentation>
 </file>
 
-<file path=ppt/revisionInfo.xml><?xml version="1.0" encoding="utf-8"?>
-<p1510:revInfo xmlns:a="http://schemas.openxmlformats.org/drawingml/2006/main" xmlns:r="http://schemas.openxmlformats.org/officeDocument/2006/relationships" xmlns:p1510="http://schemas.microsoft.com/office/powerpoint/2015/10/main">
-  <p1510:revLst>
-    <p1510:client id="{38B55CF8-04A4-41BE-A5A9-C4EC65750160}" v="7" dt="2025-09-08T15:31:39.096"/>
-  </p1510:revLst>
-</p1510:revInfo>
-</file>
-
 <file path=ppt/changesInfos/changesInfo1.xml><?xml version="1.0" encoding="utf-8"?>
 <pc:chgInfo xmlns:a="http://schemas.openxmlformats.org/drawingml/2006/main" xmlns:r="http://schemas.openxmlformats.org/officeDocument/2006/relationships" xmlns:ac="http://schemas.microsoft.com/office/drawing/2013/main/command" xmlns:pc="http://schemas.microsoft.com/office/powerpoint/2013/main/command">
   <pc:docChgLst>
-    <pc:chgData name="Sreejith Rajan" userId="ec11bca0e4bee75f" providerId="LiveId" clId="{7CA8E155-B939-49A2-B258-5F667E7F83F2}"/>
-    <pc:docChg chg="undo custSel addSld delSld modSld">
-      <pc:chgData name="Sreejith Rajan" userId="ec11bca0e4bee75f" providerId="LiveId" clId="{7CA8E155-B939-49A2-B258-5F667E7F83F2}" dt="2025-09-01T14:39:21.139" v="738"/>
+    <pc:chgData name="Sreejith Rajan" userId="ec11bca0e4bee75f" providerId="LiveId" clId="{7B4F392D-EAB3-4CE7-903E-F84869825F47}"/>
+    <pc:docChg chg="custSel modSld">
+      <pc:chgData name="Sreejith Rajan" userId="ec11bca0e4bee75f" providerId="LiveId" clId="{7B4F392D-EAB3-4CE7-903E-F84869825F47}" dt="2026-01-22T15:31:30.205" v="0" actId="478"/>
       <pc:docMkLst>
         <pc:docMk/>
       </pc:docMkLst>
-      <pc:sldChg chg="modSp mod">
-        <pc:chgData name="Sreejith Rajan" userId="ec11bca0e4bee75f" providerId="LiveId" clId="{7CA8E155-B939-49A2-B258-5F667E7F83F2}" dt="2025-09-01T12:41:09.203" v="40" actId="20577"/>
-        <pc:sldMkLst>
-          <pc:docMk/>
-          <pc:sldMk cId="0" sldId="256"/>
-        </pc:sldMkLst>
-        <pc:spChg chg="mod">
-          <ac:chgData name="Sreejith Rajan" userId="ec11bca0e4bee75f" providerId="LiveId" clId="{7CA8E155-B939-49A2-B258-5F667E7F83F2}" dt="2025-09-01T12:41:09.203" v="40" actId="20577"/>
-          <ac:spMkLst>
-            <pc:docMk/>
-            <pc:sldMk cId="0" sldId="256"/>
-            <ac:spMk id="33" creationId="{00000000-0000-0000-0000-000000000000}"/>
-          </ac:spMkLst>
-        </pc:spChg>
-      </pc:sldChg>
-      <pc:sldChg chg="modSp mod">
-        <pc:chgData name="Sreejith Rajan" userId="ec11bca0e4bee75f" providerId="LiveId" clId="{7CA8E155-B939-49A2-B258-5F667E7F83F2}" dt="2025-09-01T12:55:08.536" v="150" actId="20577"/>
-        <pc:sldMkLst>
-          <pc:docMk/>
-          <pc:sldMk cId="0" sldId="258"/>
-        </pc:sldMkLst>
-        <pc:spChg chg="mod">
-          <ac:chgData name="Sreejith Rajan" userId="ec11bca0e4bee75f" providerId="LiveId" clId="{7CA8E155-B939-49A2-B258-5F667E7F83F2}" dt="2025-09-01T12:51:57.061" v="52" actId="20577"/>
-          <ac:spMkLst>
-            <pc:docMk/>
-            <pc:sldMk cId="0" sldId="258"/>
-            <ac:spMk id="46" creationId="{00000000-0000-0000-0000-000000000000}"/>
-          </ac:spMkLst>
-        </pc:spChg>
-        <pc:spChg chg="mod">
-          <ac:chgData name="Sreejith Rajan" userId="ec11bca0e4bee75f" providerId="LiveId" clId="{7CA8E155-B939-49A2-B258-5F667E7F83F2}" dt="2025-09-01T12:55:08.536" v="150" actId="20577"/>
-          <ac:spMkLst>
-            <pc:docMk/>
-            <pc:sldMk cId="0" sldId="258"/>
-            <ac:spMk id="47" creationId="{00000000-0000-0000-0000-000000000000}"/>
-          </ac:spMkLst>
-        </pc:spChg>
-      </pc:sldChg>
-      <pc:sldChg chg="addSp delSp modSp mod">
-        <pc:chgData name="Sreejith Rajan" userId="ec11bca0e4bee75f" providerId="LiveId" clId="{7CA8E155-B939-49A2-B258-5F667E7F83F2}" dt="2025-09-01T12:56:08.409" v="165" actId="20577"/>
-        <pc:sldMkLst>
-          <pc:docMk/>
-          <pc:sldMk cId="0" sldId="259"/>
-        </pc:sldMkLst>
-      </pc:sldChg>
-      <pc:sldChg chg="delSp modSp mod">
-        <pc:chgData name="Sreejith Rajan" userId="ec11bca0e4bee75f" providerId="LiveId" clId="{7CA8E155-B939-49A2-B258-5F667E7F83F2}" dt="2025-09-01T13:09:36.295" v="247" actId="20577"/>
-        <pc:sldMkLst>
-          <pc:docMk/>
-          <pc:sldMk cId="1389626550" sldId="267"/>
-        </pc:sldMkLst>
-      </pc:sldChg>
-      <pc:sldChg chg="delSp modSp del mod">
-        <pc:chgData name="Sreejith Rajan" userId="ec11bca0e4bee75f" providerId="LiveId" clId="{7CA8E155-B939-49A2-B258-5F667E7F83F2}" dt="2025-09-01T13:13:41.916" v="280" actId="47"/>
-        <pc:sldMkLst>
-          <pc:docMk/>
-          <pc:sldMk cId="2517281589" sldId="274"/>
-        </pc:sldMkLst>
-      </pc:sldChg>
-      <pc:sldChg chg="delSp modSp mod">
-        <pc:chgData name="Sreejith Rajan" userId="ec11bca0e4bee75f" providerId="LiveId" clId="{7CA8E155-B939-49A2-B258-5F667E7F83F2}" dt="2025-09-01T12:57:52.460" v="187" actId="207"/>
-        <pc:sldMkLst>
-          <pc:docMk/>
-          <pc:sldMk cId="280470215" sldId="281"/>
-        </pc:sldMkLst>
-      </pc:sldChg>
-      <pc:sldChg chg="addSp delSp modSp mod">
-        <pc:chgData name="Sreejith Rajan" userId="ec11bca0e4bee75f" providerId="LiveId" clId="{7CA8E155-B939-49A2-B258-5F667E7F83F2}" dt="2025-09-01T13:07:46.235" v="213" actId="20577"/>
-        <pc:sldMkLst>
-          <pc:docMk/>
-          <pc:sldMk cId="682396941" sldId="282"/>
-        </pc:sldMkLst>
-      </pc:sldChg>
-      <pc:sldChg chg="addSp delSp modSp mod">
-        <pc:chgData name="Sreejith Rajan" userId="ec11bca0e4bee75f" providerId="LiveId" clId="{7CA8E155-B939-49A2-B258-5F667E7F83F2}" dt="2025-09-01T13:13:17.314" v="272" actId="20577"/>
-        <pc:sldMkLst>
-          <pc:docMk/>
-          <pc:sldMk cId="3362503428" sldId="283"/>
-        </pc:sldMkLst>
-      </pc:sldChg>
-      <pc:sldChg chg="delSp modSp mod">
-        <pc:chgData name="Sreejith Rajan" userId="ec11bca0e4bee75f" providerId="LiveId" clId="{7CA8E155-B939-49A2-B258-5F667E7F83F2}" dt="2025-09-01T13:15:12.557" v="344" actId="20577"/>
-        <pc:sldMkLst>
-          <pc:docMk/>
-          <pc:sldMk cId="3896615428" sldId="284"/>
-        </pc:sldMkLst>
-      </pc:sldChg>
-      <pc:sldChg chg="addSp modSp add mod">
-        <pc:chgData name="Sreejith Rajan" userId="ec11bca0e4bee75f" providerId="LiveId" clId="{7CA8E155-B939-49A2-B258-5F667E7F83F2}" dt="2025-09-01T13:21:58.159" v="365" actId="1076"/>
-        <pc:sldMkLst>
-          <pc:docMk/>
-          <pc:sldMk cId="2768999598" sldId="285"/>
-        </pc:sldMkLst>
-        <pc:spChg chg="mod">
-          <ac:chgData name="Sreejith Rajan" userId="ec11bca0e4bee75f" providerId="LiveId" clId="{7CA8E155-B939-49A2-B258-5F667E7F83F2}" dt="2025-09-01T13:15:31.332" v="346" actId="6549"/>
-          <ac:spMkLst>
-            <pc:docMk/>
-            <pc:sldMk cId="2768999598" sldId="285"/>
-            <ac:spMk id="55" creationId="{6BEB0E42-D1CA-59A5-9488-2502CA7BE06C}"/>
-          </ac:spMkLst>
-        </pc:spChg>
-        <pc:picChg chg="add mod">
-          <ac:chgData name="Sreejith Rajan" userId="ec11bca0e4bee75f" providerId="LiveId" clId="{7CA8E155-B939-49A2-B258-5F667E7F83F2}" dt="2025-09-01T13:19:22.064" v="349" actId="1076"/>
-          <ac:picMkLst>
-            <pc:docMk/>
-            <pc:sldMk cId="2768999598" sldId="285"/>
-            <ac:picMk id="3" creationId="{F049E54F-32FF-A872-DFAD-A13C2BC8A69F}"/>
-          </ac:picMkLst>
-        </pc:picChg>
-        <pc:picChg chg="add mod">
-          <ac:chgData name="Sreejith Rajan" userId="ec11bca0e4bee75f" providerId="LiveId" clId="{7CA8E155-B939-49A2-B258-5F667E7F83F2}" dt="2025-09-01T13:21:18.169" v="357" actId="14100"/>
-          <ac:picMkLst>
-            <pc:docMk/>
-            <pc:sldMk cId="2768999598" sldId="285"/>
-            <ac:picMk id="5" creationId="{1D4DB7B7-8B39-AB5C-99C4-470C262646B3}"/>
-          </ac:picMkLst>
-        </pc:picChg>
-        <pc:picChg chg="add mod">
-          <ac:chgData name="Sreejith Rajan" userId="ec11bca0e4bee75f" providerId="LiveId" clId="{7CA8E155-B939-49A2-B258-5F667E7F83F2}" dt="2025-09-01T13:21:58.159" v="365" actId="1076"/>
-          <ac:picMkLst>
-            <pc:docMk/>
-            <pc:sldMk cId="2768999598" sldId="285"/>
-            <ac:picMk id="9" creationId="{4E656B9C-8D8D-3826-C97D-DB27E2D7542A}"/>
-          </ac:picMkLst>
-        </pc:picChg>
-      </pc:sldChg>
-      <pc:sldChg chg="new del">
-        <pc:chgData name="Sreejith Rajan" userId="ec11bca0e4bee75f" providerId="LiveId" clId="{7CA8E155-B939-49A2-B258-5F667E7F83F2}" dt="2025-09-01T13:28:35.039" v="367" actId="47"/>
-        <pc:sldMkLst>
-          <pc:docMk/>
-          <pc:sldMk cId="1073535821" sldId="286"/>
-        </pc:sldMkLst>
-      </pc:sldChg>
-      <pc:sldChg chg="delSp modSp add mod">
-        <pc:chgData name="Sreejith Rajan" userId="ec11bca0e4bee75f" providerId="LiveId" clId="{7CA8E155-B939-49A2-B258-5F667E7F83F2}" dt="2025-09-01T14:39:21.139" v="738"/>
-        <pc:sldMkLst>
-          <pc:docMk/>
-          <pc:sldMk cId="1488398723" sldId="286"/>
-        </pc:sldMkLst>
-        <pc:spChg chg="mod">
-          <ac:chgData name="Sreejith Rajan" userId="ec11bca0e4bee75f" providerId="LiveId" clId="{7CA8E155-B939-49A2-B258-5F667E7F83F2}" dt="2025-09-01T13:29:03.591" v="390" actId="20577"/>
-          <ac:spMkLst>
-            <pc:docMk/>
-            <pc:sldMk cId="1488398723" sldId="286"/>
-            <ac:spMk id="54" creationId="{D6A271FB-F06E-A094-1264-BE3F39E98C88}"/>
-          </ac:spMkLst>
-        </pc:spChg>
-        <pc:spChg chg="mod">
-          <ac:chgData name="Sreejith Rajan" userId="ec11bca0e4bee75f" providerId="LiveId" clId="{7CA8E155-B939-49A2-B258-5F667E7F83F2}" dt="2025-09-01T14:25:23.987" v="736" actId="207"/>
-          <ac:spMkLst>
-            <pc:docMk/>
-            <pc:sldMk cId="1488398723" sldId="286"/>
-            <ac:spMk id="55" creationId="{E31F05FC-C44B-CD53-A530-278FD5640965}"/>
-          </ac:spMkLst>
-        </pc:spChg>
-      </pc:sldChg>
-      <pc:sldChg chg="new del">
-        <pc:chgData name="Sreejith Rajan" userId="ec11bca0e4bee75f" providerId="LiveId" clId="{7CA8E155-B939-49A2-B258-5F667E7F83F2}" dt="2025-09-01T13:28:42.025" v="369" actId="680"/>
-        <pc:sldMkLst>
-          <pc:docMk/>
-          <pc:sldMk cId="3982304584" sldId="286"/>
-        </pc:sldMkLst>
-      </pc:sldChg>
-    </pc:docChg>
-  </pc:docChgLst>
-  <pc:docChgLst>
-    <pc:chgData name="Sreejith Rajan" userId="ec11bca0e4bee75f" providerId="LiveId" clId="{38B55CF8-04A4-41BE-A5A9-C4EC65750160}"/>
-    <pc:docChg chg="undo custSel addSld delSld modSld">
-      <pc:chgData name="Sreejith Rajan" userId="ec11bca0e4bee75f" providerId="LiveId" clId="{38B55CF8-04A4-41BE-A5A9-C4EC65750160}" dt="2025-09-08T15:31:45.658" v="225" actId="20577"/>
-      <pc:docMkLst>
-        <pc:docMk/>
-      </pc:docMkLst>
-      <pc:sldChg chg="modSp mod">
-        <pc:chgData name="Sreejith Rajan" userId="ec11bca0e4bee75f" providerId="LiveId" clId="{38B55CF8-04A4-41BE-A5A9-C4EC65750160}" dt="2025-09-08T13:50:00.971" v="1" actId="20577"/>
-        <pc:sldMkLst>
-          <pc:docMk/>
-          <pc:sldMk cId="0" sldId="256"/>
-        </pc:sldMkLst>
-        <pc:spChg chg="mod">
-          <ac:chgData name="Sreejith Rajan" userId="ec11bca0e4bee75f" providerId="LiveId" clId="{38B55CF8-04A4-41BE-A5A9-C4EC65750160}" dt="2025-09-08T13:50:00.971" v="1" actId="20577"/>
-          <ac:spMkLst>
-            <pc:docMk/>
-            <pc:sldMk cId="0" sldId="256"/>
-            <ac:spMk id="33" creationId="{00000000-0000-0000-0000-000000000000}"/>
-          </ac:spMkLst>
-        </pc:spChg>
-      </pc:sldChg>
-      <pc:sldChg chg="del">
-        <pc:chgData name="Sreejith Rajan" userId="ec11bca0e4bee75f" providerId="LiveId" clId="{38B55CF8-04A4-41BE-A5A9-C4EC65750160}" dt="2025-09-08T13:50:29.832" v="4" actId="47"/>
-        <pc:sldMkLst>
-          <pc:docMk/>
-          <pc:sldMk cId="0" sldId="259"/>
-        </pc:sldMkLst>
-      </pc:sldChg>
-      <pc:sldChg chg="del">
-        <pc:chgData name="Sreejith Rajan" userId="ec11bca0e4bee75f" providerId="LiveId" clId="{38B55CF8-04A4-41BE-A5A9-C4EC65750160}" dt="2025-09-08T13:50:32.956" v="7" actId="47"/>
-        <pc:sldMkLst>
-          <pc:docMk/>
-          <pc:sldMk cId="1389626550" sldId="267"/>
-        </pc:sldMkLst>
-      </pc:sldChg>
-      <pc:sldChg chg="del">
-        <pc:chgData name="Sreejith Rajan" userId="ec11bca0e4bee75f" providerId="LiveId" clId="{38B55CF8-04A4-41BE-A5A9-C4EC65750160}" dt="2025-09-08T13:50:30.637" v="5" actId="47"/>
-        <pc:sldMkLst>
-          <pc:docMk/>
-          <pc:sldMk cId="280470215" sldId="281"/>
-        </pc:sldMkLst>
-      </pc:sldChg>
-      <pc:sldChg chg="del">
-        <pc:chgData name="Sreejith Rajan" userId="ec11bca0e4bee75f" providerId="LiveId" clId="{38B55CF8-04A4-41BE-A5A9-C4EC65750160}" dt="2025-09-08T13:50:31.500" v="6" actId="47"/>
-        <pc:sldMkLst>
-          <pc:docMk/>
-          <pc:sldMk cId="682396941" sldId="282"/>
-        </pc:sldMkLst>
-      </pc:sldChg>
-      <pc:sldChg chg="del">
-        <pc:chgData name="Sreejith Rajan" userId="ec11bca0e4bee75f" providerId="LiveId" clId="{38B55CF8-04A4-41BE-A5A9-C4EC65750160}" dt="2025-09-08T13:50:21.633" v="3" actId="47"/>
-        <pc:sldMkLst>
-          <pc:docMk/>
-          <pc:sldMk cId="3362503428" sldId="283"/>
-        </pc:sldMkLst>
-      </pc:sldChg>
-      <pc:sldChg chg="del">
-        <pc:chgData name="Sreejith Rajan" userId="ec11bca0e4bee75f" providerId="LiveId" clId="{38B55CF8-04A4-41BE-A5A9-C4EC65750160}" dt="2025-09-08T13:50:19.202" v="2" actId="47"/>
-        <pc:sldMkLst>
-          <pc:docMk/>
-          <pc:sldMk cId="3896615428" sldId="284"/>
-        </pc:sldMkLst>
-      </pc:sldChg>
-      <pc:sldChg chg="modSp add mod">
-        <pc:chgData name="Sreejith Rajan" userId="ec11bca0e4bee75f" providerId="LiveId" clId="{38B55CF8-04A4-41BE-A5A9-C4EC65750160}" dt="2025-09-08T13:59:59.014" v="33" actId="207"/>
-        <pc:sldMkLst>
-          <pc:docMk/>
-          <pc:sldMk cId="1663749710" sldId="287"/>
-        </pc:sldMkLst>
-        <pc:spChg chg="mod">
-          <ac:chgData name="Sreejith Rajan" userId="ec11bca0e4bee75f" providerId="LiveId" clId="{38B55CF8-04A4-41BE-A5A9-C4EC65750160}" dt="2025-09-08T13:59:59.014" v="33" actId="207"/>
-          <ac:spMkLst>
-            <pc:docMk/>
-            <pc:sldMk cId="1663749710" sldId="287"/>
-            <ac:spMk id="55" creationId="{9D459962-4DD0-F78C-D4B1-9533D50F2189}"/>
-          </ac:spMkLst>
-        </pc:spChg>
-      </pc:sldChg>
-      <pc:sldChg chg="addSp modSp add mod">
-        <pc:chgData name="Sreejith Rajan" userId="ec11bca0e4bee75f" providerId="LiveId" clId="{38B55CF8-04A4-41BE-A5A9-C4EC65750160}" dt="2025-09-08T14:04:15.571" v="122" actId="207"/>
-        <pc:sldMkLst>
-          <pc:docMk/>
-          <pc:sldMk cId="41759279" sldId="288"/>
-        </pc:sldMkLst>
-        <pc:spChg chg="add mod">
-          <ac:chgData name="Sreejith Rajan" userId="ec11bca0e4bee75f" providerId="LiveId" clId="{38B55CF8-04A4-41BE-A5A9-C4EC65750160}" dt="2025-09-08T14:04:15.571" v="122" actId="207"/>
-          <ac:spMkLst>
-            <pc:docMk/>
-            <pc:sldMk cId="41759279" sldId="288"/>
-            <ac:spMk id="4" creationId="{FB3AA076-C728-DE15-E6C1-ACBFC6185AEC}"/>
-          </ac:spMkLst>
-        </pc:spChg>
-        <pc:spChg chg="mod">
-          <ac:chgData name="Sreejith Rajan" userId="ec11bca0e4bee75f" providerId="LiveId" clId="{38B55CF8-04A4-41BE-A5A9-C4EC65750160}" dt="2025-09-08T14:02:27.716" v="53" actId="5793"/>
-          <ac:spMkLst>
-            <pc:docMk/>
-            <pc:sldMk cId="41759279" sldId="288"/>
-            <ac:spMk id="55" creationId="{31D1C086-CEB8-963B-EA88-5E660E81E542}"/>
-          </ac:spMkLst>
-        </pc:spChg>
-        <pc:picChg chg="add mod">
-          <ac:chgData name="Sreejith Rajan" userId="ec11bca0e4bee75f" providerId="LiveId" clId="{38B55CF8-04A4-41BE-A5A9-C4EC65750160}" dt="2025-09-08T14:02:50.791" v="55" actId="1076"/>
-          <ac:picMkLst>
-            <pc:docMk/>
-            <pc:sldMk cId="41759279" sldId="288"/>
-            <ac:picMk id="3" creationId="{0E6054C8-B2C6-40C6-D52D-BC9087C611CC}"/>
-          </ac:picMkLst>
-        </pc:picChg>
-      </pc:sldChg>
-      <pc:sldChg chg="new del">
-        <pc:chgData name="Sreejith Rajan" userId="ec11bca0e4bee75f" providerId="LiveId" clId="{38B55CF8-04A4-41BE-A5A9-C4EC65750160}" dt="2025-09-08T14:10:52.179" v="124" actId="680"/>
-        <pc:sldMkLst>
-          <pc:docMk/>
-          <pc:sldMk cId="3146899580" sldId="289"/>
-        </pc:sldMkLst>
-      </pc:sldChg>
-      <pc:sldChg chg="delSp modSp add mod">
-        <pc:chgData name="Sreejith Rajan" userId="ec11bca0e4bee75f" providerId="LiveId" clId="{38B55CF8-04A4-41BE-A5A9-C4EC65750160}" dt="2025-09-08T14:12:01.449" v="193" actId="207"/>
+      <pc:sldChg chg="delSp mod">
+        <pc:chgData name="Sreejith Rajan" userId="ec11bca0e4bee75f" providerId="LiveId" clId="{7B4F392D-EAB3-4CE7-903E-F84869825F47}" dt="2026-01-22T15:31:30.205" v="0" actId="478"/>
         <pc:sldMkLst>
           <pc:docMk/>
           <pc:sldMk cId="3940705627" sldId="289"/>
         </pc:sldMkLst>
-        <pc:spChg chg="mod">
-          <ac:chgData name="Sreejith Rajan" userId="ec11bca0e4bee75f" providerId="LiveId" clId="{38B55CF8-04A4-41BE-A5A9-C4EC65750160}" dt="2025-09-08T14:12:01.449" v="193" actId="207"/>
+        <pc:spChg chg="del">
+          <ac:chgData name="Sreejith Rajan" userId="ec11bca0e4bee75f" providerId="LiveId" clId="{7B4F392D-EAB3-4CE7-903E-F84869825F47}" dt="2026-01-22T15:31:30.205" v="0" actId="478"/>
           <ac:spMkLst>
             <pc:docMk/>
             <pc:sldMk cId="3940705627" sldId="289"/>
-            <ac:spMk id="55" creationId="{8B6D3D6C-ACD3-C0E3-6DA7-21D8604009CE}"/>
+            <ac:spMk id="4" creationId="{688CFE87-77E9-1FBC-FA66-DAF4B1407288}"/>
           </ac:spMkLst>
         </pc:spChg>
-        <pc:picChg chg="del">
-          <ac:chgData name="Sreejith Rajan" userId="ec11bca0e4bee75f" providerId="LiveId" clId="{38B55CF8-04A4-41BE-A5A9-C4EC65750160}" dt="2025-09-08T14:11:02.594" v="126" actId="478"/>
-          <ac:picMkLst>
-            <pc:docMk/>
-            <pc:sldMk cId="3940705627" sldId="289"/>
-            <ac:picMk id="3" creationId="{CFB9FA14-5E8D-2C17-29AD-A58EBED7C8DB}"/>
-          </ac:picMkLst>
-        </pc:picChg>
-      </pc:sldChg>
-      <pc:sldChg chg="addSp delSp modSp new mod">
-        <pc:chgData name="Sreejith Rajan" userId="ec11bca0e4bee75f" providerId="LiveId" clId="{38B55CF8-04A4-41BE-A5A9-C4EC65750160}" dt="2025-09-08T15:31:45.658" v="225" actId="20577"/>
-        <pc:sldMkLst>
-          <pc:docMk/>
-          <pc:sldMk cId="3880237196" sldId="290"/>
-        </pc:sldMkLst>
-        <pc:spChg chg="mod">
-          <ac:chgData name="Sreejith Rajan" userId="ec11bca0e4bee75f" providerId="LiveId" clId="{38B55CF8-04A4-41BE-A5A9-C4EC65750160}" dt="2025-09-08T15:29:19.748" v="198" actId="20577"/>
-          <ac:spMkLst>
-            <pc:docMk/>
-            <pc:sldMk cId="3880237196" sldId="290"/>
-            <ac:spMk id="2" creationId="{0D6759DC-42D5-0AF6-120A-F1878B34ECF3}"/>
-          </ac:spMkLst>
-        </pc:spChg>
-        <pc:spChg chg="mod">
-          <ac:chgData name="Sreejith Rajan" userId="ec11bca0e4bee75f" providerId="LiveId" clId="{38B55CF8-04A4-41BE-A5A9-C4EC65750160}" dt="2025-09-08T15:29:25.341" v="200" actId="27636"/>
-          <ac:spMkLst>
-            <pc:docMk/>
-            <pc:sldMk cId="3880237196" sldId="290"/>
-            <ac:spMk id="3" creationId="{11FC7E3C-2E7E-F3F7-C66E-39CC75661492}"/>
-          </ac:spMkLst>
-        </pc:spChg>
-        <pc:spChg chg="add">
-          <ac:chgData name="Sreejith Rajan" userId="ec11bca0e4bee75f" providerId="LiveId" clId="{38B55CF8-04A4-41BE-A5A9-C4EC65750160}" dt="2025-09-08T15:28:58.006" v="195" actId="11529"/>
-          <ac:spMkLst>
-            <pc:docMk/>
-            <pc:sldMk cId="3880237196" sldId="290"/>
-            <ac:spMk id="4" creationId="{2C5EFD46-3598-942C-BF2F-87ED957FFE3C}"/>
-          </ac:spMkLst>
-        </pc:spChg>
-        <pc:spChg chg="add del mod">
-          <ac:chgData name="Sreejith Rajan" userId="ec11bca0e4bee75f" providerId="LiveId" clId="{38B55CF8-04A4-41BE-A5A9-C4EC65750160}" dt="2025-09-08T15:29:40.987" v="204" actId="478"/>
-          <ac:spMkLst>
-            <pc:docMk/>
-            <pc:sldMk cId="3880237196" sldId="290"/>
-            <ac:spMk id="7" creationId="{3124D0B9-4FF6-9F0C-D058-00B0F0B8AEC1}"/>
-          </ac:spMkLst>
-        </pc:spChg>
-        <pc:spChg chg="add mod">
-          <ac:chgData name="Sreejith Rajan" userId="ec11bca0e4bee75f" providerId="LiveId" clId="{38B55CF8-04A4-41BE-A5A9-C4EC65750160}" dt="2025-09-08T15:30:03.497" v="209" actId="1076"/>
-          <ac:spMkLst>
-            <pc:docMk/>
-            <pc:sldMk cId="3880237196" sldId="290"/>
-            <ac:spMk id="8" creationId="{28AF751C-2936-AD03-FC48-411D75AFF699}"/>
-          </ac:spMkLst>
-        </pc:spChg>
-        <pc:spChg chg="add mod">
-          <ac:chgData name="Sreejith Rajan" userId="ec11bca0e4bee75f" providerId="LiveId" clId="{38B55CF8-04A4-41BE-A5A9-C4EC65750160}" dt="2025-09-08T15:30:45.209" v="212" actId="1076"/>
-          <ac:spMkLst>
-            <pc:docMk/>
-            <pc:sldMk cId="3880237196" sldId="290"/>
-            <ac:spMk id="9" creationId="{3D67DDF6-950E-00E4-5E3B-992DC34620F6}"/>
-          </ac:spMkLst>
-        </pc:spChg>
-        <pc:spChg chg="add mod">
-          <ac:chgData name="Sreejith Rajan" userId="ec11bca0e4bee75f" providerId="LiveId" clId="{38B55CF8-04A4-41BE-A5A9-C4EC65750160}" dt="2025-09-08T15:31:45.658" v="225" actId="20577"/>
-          <ac:spMkLst>
-            <pc:docMk/>
-            <pc:sldMk cId="3880237196" sldId="290"/>
-            <ac:spMk id="18" creationId="{DE33A794-513E-7CDD-5E92-DDBC534FA3BD}"/>
-          </ac:spMkLst>
-        </pc:spChg>
-        <pc:cxnChg chg="add">
-          <ac:chgData name="Sreejith Rajan" userId="ec11bca0e4bee75f" providerId="LiveId" clId="{38B55CF8-04A4-41BE-A5A9-C4EC65750160}" dt="2025-09-08T15:29:08.281" v="196" actId="11529"/>
-          <ac:cxnSpMkLst>
-            <pc:docMk/>
-            <pc:sldMk cId="3880237196" sldId="290"/>
-            <ac:cxnSpMk id="6" creationId="{83897338-A001-A220-54A0-D39590172D23}"/>
-          </ac:cxnSpMkLst>
-        </pc:cxnChg>
-        <pc:cxnChg chg="add mod">
-          <ac:chgData name="Sreejith Rajan" userId="ec11bca0e4bee75f" providerId="LiveId" clId="{38B55CF8-04A4-41BE-A5A9-C4EC65750160}" dt="2025-09-08T15:31:17.634" v="218" actId="14100"/>
-          <ac:cxnSpMkLst>
-            <pc:docMk/>
-            <pc:sldMk cId="3880237196" sldId="290"/>
-            <ac:cxnSpMk id="11" creationId="{DED2CD88-2DF5-049C-47A9-0BE434C3015D}"/>
-          </ac:cxnSpMkLst>
-        </pc:cxnChg>
-        <pc:cxnChg chg="add mod">
-          <ac:chgData name="Sreejith Rajan" userId="ec11bca0e4bee75f" providerId="LiveId" clId="{38B55CF8-04A4-41BE-A5A9-C4EC65750160}" dt="2025-09-08T15:31:26.045" v="220" actId="14100"/>
-          <ac:cxnSpMkLst>
-            <pc:docMk/>
-            <pc:sldMk cId="3880237196" sldId="290"/>
-            <ac:cxnSpMk id="16" creationId="{D84ACFDD-53AC-322C-CDD2-E565878EC8BF}"/>
-          </ac:cxnSpMkLst>
-        </pc:cxnChg>
       </pc:sldChg>
     </pc:docChg>
   </pc:docChgLst>
@@ -6838,58 +6453,6 @@
           </a:p>
         </p:txBody>
       </p:sp>
-      <p:sp>
-        <p:nvSpPr>
-          <p:cNvPr id="4" name="Rectangle 3">
-            <a:extLst>
-              <a:ext uri="{FF2B5EF4-FFF2-40B4-BE49-F238E27FC236}">
-                <a16:creationId xmlns:a16="http://schemas.microsoft.com/office/drawing/2014/main" id="{688CFE87-77E9-1FBC-FA66-DAF4B1407288}"/>
-              </a:ext>
-            </a:extLst>
-          </p:cNvPr>
-          <p:cNvSpPr/>
-          <p:nvPr/>
-        </p:nvSpPr>
-        <p:spPr>
-          <a:xfrm>
-            <a:off x="7105650" y="4400550"/>
-            <a:ext cx="321524" cy="592074"/>
-          </a:xfrm>
-          <a:prstGeom prst="rect">
-            <a:avLst/>
-          </a:prstGeom>
-          <a:solidFill>
-            <a:srgbClr val="FFFFFF"/>
-          </a:solidFill>
-          <a:ln>
-            <a:noFill/>
-          </a:ln>
-        </p:spPr>
-        <p:style>
-          <a:lnRef idx="2">
-            <a:schemeClr val="accent1">
-              <a:shade val="15000"/>
-            </a:schemeClr>
-          </a:lnRef>
-          <a:fillRef idx="1">
-            <a:schemeClr val="accent1"/>
-          </a:fillRef>
-          <a:effectRef idx="0">
-            <a:schemeClr val="accent1"/>
-          </a:effectRef>
-          <a:fontRef idx="minor">
-            <a:schemeClr val="lt1"/>
-          </a:fontRef>
-        </p:style>
-        <p:txBody>
-          <a:bodyPr rtlCol="0" anchor="ctr"/>
-          <a:lstStyle/>
-          <a:p>
-            <a:pPr algn="ctr"/>
-            <a:endParaRPr lang="en-IN"/>
-          </a:p>
-        </p:txBody>
-      </p:sp>
     </p:spTree>
     <p:extLst>
       <p:ext uri="{BB962C8B-B14F-4D97-AF65-F5344CB8AC3E}">

--- a/Presentations/AVR Live Class 2.pptx
+++ b/Presentations/AVR Live Class 2.pptx
@@ -287,29 +287,44 @@
 </p:presentation>
 </file>
 
+<file path=ppt/revisionInfo.xml><?xml version="1.0" encoding="utf-8"?>
+<p1510:revInfo xmlns:a="http://schemas.openxmlformats.org/drawingml/2006/main" xmlns:r="http://schemas.openxmlformats.org/officeDocument/2006/relationships" xmlns:p1510="http://schemas.microsoft.com/office/powerpoint/2015/10/main">
+  <p1510:revLst>
+    <p1510:client id="{5BA3ACFA-B8CD-42CC-9AE6-846CCBE0A028}" v="2" dt="2026-01-27T16:37:23.204"/>
+  </p1510:revLst>
+</p1510:revInfo>
+</file>
+
 <file path=ppt/changesInfos/changesInfo1.xml><?xml version="1.0" encoding="utf-8"?>
 <pc:chgInfo xmlns:a="http://schemas.openxmlformats.org/drawingml/2006/main" xmlns:r="http://schemas.openxmlformats.org/officeDocument/2006/relationships" xmlns:ac="http://schemas.microsoft.com/office/drawing/2013/main/command" xmlns:pc="http://schemas.microsoft.com/office/powerpoint/2013/main/command">
   <pc:docChgLst>
     <pc:chgData name="Sreejith Rajan" userId="ec11bca0e4bee75f" providerId="LiveId" clId="{7B4F392D-EAB3-4CE7-903E-F84869825F47}"/>
     <pc:docChg chg="custSel modSld">
-      <pc:chgData name="Sreejith Rajan" userId="ec11bca0e4bee75f" providerId="LiveId" clId="{7B4F392D-EAB3-4CE7-903E-F84869825F47}" dt="2026-01-22T15:31:30.205" v="0" actId="478"/>
+      <pc:chgData name="Sreejith Rajan" userId="ec11bca0e4bee75f" providerId="LiveId" clId="{7B4F392D-EAB3-4CE7-903E-F84869825F47}" dt="2026-01-27T16:37:20.893" v="1" actId="20578"/>
       <pc:docMkLst>
         <pc:docMk/>
       </pc:docMkLst>
+      <pc:sldChg chg="modSp">
+        <pc:chgData name="Sreejith Rajan" userId="ec11bca0e4bee75f" providerId="LiveId" clId="{7B4F392D-EAB3-4CE7-903E-F84869825F47}" dt="2026-01-27T16:37:20.893" v="1" actId="20578"/>
+        <pc:sldMkLst>
+          <pc:docMk/>
+          <pc:sldMk cId="1488398723" sldId="286"/>
+        </pc:sldMkLst>
+        <pc:spChg chg="mod">
+          <ac:chgData name="Sreejith Rajan" userId="ec11bca0e4bee75f" providerId="LiveId" clId="{7B4F392D-EAB3-4CE7-903E-F84869825F47}" dt="2026-01-27T16:37:20.893" v="1" actId="20578"/>
+          <ac:spMkLst>
+            <pc:docMk/>
+            <pc:sldMk cId="1488398723" sldId="286"/>
+            <ac:spMk id="55" creationId="{E31F05FC-C44B-CD53-A530-278FD5640965}"/>
+          </ac:spMkLst>
+        </pc:spChg>
+      </pc:sldChg>
       <pc:sldChg chg="delSp mod">
         <pc:chgData name="Sreejith Rajan" userId="ec11bca0e4bee75f" providerId="LiveId" clId="{7B4F392D-EAB3-4CE7-903E-F84869825F47}" dt="2026-01-22T15:31:30.205" v="0" actId="478"/>
         <pc:sldMkLst>
           <pc:docMk/>
           <pc:sldMk cId="3940705627" sldId="289"/>
         </pc:sldMkLst>
-        <pc:spChg chg="del">
-          <ac:chgData name="Sreejith Rajan" userId="ec11bca0e4bee75f" providerId="LiveId" clId="{7B4F392D-EAB3-4CE7-903E-F84869825F47}" dt="2026-01-22T15:31:30.205" v="0" actId="478"/>
-          <ac:spMkLst>
-            <pc:docMk/>
-            <pc:sldMk cId="3940705627" sldId="289"/>
-            <ac:spMk id="4" creationId="{688CFE87-77E9-1FBC-FA66-DAF4B1407288}"/>
-          </ac:spMkLst>
-        </pc:spChg>
       </pc:sldChg>
     </pc:docChg>
   </pc:docChgLst>
